--- a/docs/sdd/sdd_openspec_problem_update.pptx
+++ b/docs/sdd/sdd_openspec_problem_update.pptx
@@ -5,13 +5,13 @@
     <p:sldMasterId id="2147483648" r:id="rId1"/>
   </p:sldMasterIdLst>
   <p:sldIdLst>
-    <p:sldId id="256" r:id="rId2"/>
-    <p:sldId id="257" r:id="rId3"/>
-    <p:sldId id="258" r:id="rId4"/>
-    <p:sldId id="259" r:id="rId5"/>
-    <p:sldId id="260" r:id="rId6"/>
+    <p:sldId id="256" r:id="rId3"/>
+    <p:sldId id="257" r:id="rId4"/>
+    <p:sldId id="258" r:id="rId5"/>
+    <p:sldId id="259" r:id="rId6"/>
+    <p:sldId id="260" r:id="rId7"/>
   </p:sldIdLst>
-  <p:sldSz cx="12192000" cy="6858000" type="wide"/>
+  <p:sldSz cx="12192000" cy="6858000" type="screen4x3"/>
   <p:notesSz cx="6858000" cy="9144000"/>
   <p:defaultTextStyle>
     <a:defPPr>
@@ -54,6 +54,7 @@
         <a:solidFill>
           <a:schemeClr val="bg1"/>
         </a:solidFill>
+        <a:effectLst/>
       </p:bgPr>
     </p:bg>
     <p:spTree>
@@ -119,6 +120,7 @@
         <a:solidFill>
           <a:srgbClr val="F8FAFC"/>
         </a:solidFill>
+        <a:effectLst/>
       </p:bgPr>
     </p:bg>
     <p:spTree>
@@ -179,7 +181,7 @@
           </a:ln>
         </p:spPr>
         <p:txBody>
-          <a:bodyPr wrap="square" anchor="t" lIns="18288" rIns="18288" tIns="18288" bIns="18288"/>
+          <a:bodyPr wrap="square" lIns="18288" tIns="18288" rIns="18288" bIns="18288" anchor="t"/>
           <a:lstStyle/>
           <a:p>
             <a:pPr algn="l"/>
@@ -193,6 +195,13 @@
               </a:rPr>
               <a:t>SDD/OpenSpec: зачем менять workflow</a:t>
             </a:r>
+            <a:endParaRPr lang="ru-RU" sz="3000" b="1" dirty="0">
+              <a:solidFill>
+                <a:srgbClr val="0F172A"/>
+              </a:solidFill>
+              <a:latin typeface="Aptos"/>
+              <a:cs typeface="Aptos"/>
+            </a:endParaRPr>
           </a:p>
         </p:txBody>
       </p:sp>
@@ -216,7 +225,7 @@
           </a:ln>
         </p:spPr>
         <p:txBody>
-          <a:bodyPr wrap="square" anchor="t" lIns="18288" rIns="18288" tIns="18288" bIns="18288"/>
+          <a:bodyPr wrap="square" lIns="18288" tIns="18288" rIns="18288" bIns="18288" anchor="t"/>
           <a:lstStyle/>
           <a:p>
             <a:pPr algn="l"/>
@@ -228,8 +237,15 @@
                 <a:latin typeface="Aptos"/>
                 <a:cs typeface="Aptos"/>
               </a:rPr>
-              <a:t>Проблема из PROBLEM.md</a:t>
-            </a:r>
+              <a:t>Проблема</a:t>
+            </a:r>
+            <a:endParaRPr lang="ru-RU" sz="1400" b="1" dirty="0">
+              <a:solidFill>
+                <a:srgbClr val="2563EB"/>
+              </a:solidFill>
+              <a:latin typeface="Aptos"/>
+              <a:cs typeface="Aptos"/>
+            </a:endParaRPr>
           </a:p>
         </p:txBody>
       </p:sp>
@@ -253,7 +269,7 @@
           </a:ln>
         </p:spPr>
         <p:txBody>
-          <a:bodyPr wrap="square" anchor="t" lIns="18288" rIns="18288" tIns="18288" bIns="18288"/>
+          <a:bodyPr wrap="square" lIns="18288" tIns="18288" rIns="18288" bIns="18288" anchor="t"/>
           <a:lstStyle/>
           <a:p>
             <a:pPr algn="l"/>
@@ -265,8 +281,15 @@
                 <a:latin typeface="Aptos"/>
                 <a:cs typeface="Aptos"/>
               </a:rPr>
-              <a:t>• Старый фрейм требовал создать мастер-спецификацию сервиса как один большой Markdown.</a:t>
-            </a:r>
+              <a:t>• Старый фреймворк требовал создать мастер-спецификацию сервиса как один большой Markdown.</a:t>
+            </a:r>
+            <a:endParaRPr lang="ru-RU" sz="1600" dirty="0">
+              <a:solidFill>
+                <a:srgbClr val="334155"/>
+              </a:solidFill>
+              <a:latin typeface="Aptos"/>
+              <a:cs typeface="Aptos"/>
+            </a:endParaRPr>
           </a:p>
           <a:p>
             <a:pPr algn="l"/>
@@ -280,6 +303,13 @@
               </a:rPr>
               <a:t>• Для больших сервисов это превращается в монструозный документ и перегружает контекст агента.</a:t>
             </a:r>
+            <a:endParaRPr lang="ru-RU" sz="1600" dirty="0">
+              <a:solidFill>
+                <a:srgbClr val="334155"/>
+              </a:solidFill>
+              <a:latin typeface="Aptos"/>
+              <a:cs typeface="Aptos"/>
+            </a:endParaRPr>
           </a:p>
           <a:p>
             <a:pPr algn="l"/>
@@ -291,11 +321,18 @@
                 <a:latin typeface="Aptos"/>
                 <a:cs typeface="Aptos"/>
               </a:rPr>
-              <a:t>• На проектах уже часто есть нормальная документация в папках: workflow, integrations, api, data.</a:t>
-            </a:r>
-          </a:p>
-          <a:p>
-            <a:pPr algn="l"/>
+              <a:t>• На проектах уже часто есть нормальная документация сервисов в </a:t>
+            </a:r>
+            <a:r>
+              <a:rPr lang="en-US" sz="1600" dirty="0">
+                <a:solidFill>
+                  <a:srgbClr val="334155"/>
+                </a:solidFill>
+                <a:latin typeface="Aptos"/>
+                <a:cs typeface="Aptos"/>
+              </a:rPr>
+              <a:t>MD</a:t>
+            </a:r>
             <a:r>
               <a:rPr lang="ru-RU" sz="1600" dirty="0">
                 <a:solidFill>
@@ -304,8 +341,35 @@
                 <a:latin typeface="Aptos"/>
                 <a:cs typeface="Aptos"/>
               </a:rPr>
+              <a:t> в папках: workflow, integrations, api, data.</a:t>
+            </a:r>
+            <a:endParaRPr lang="ru-RU" sz="1600" dirty="0">
+              <a:solidFill>
+                <a:srgbClr val="334155"/>
+              </a:solidFill>
+              <a:latin typeface="Aptos"/>
+              <a:cs typeface="Aptos"/>
+            </a:endParaRPr>
+          </a:p>
+          <a:p>
+            <a:pPr algn="l"/>
+            <a:r>
+              <a:rPr lang="ru-RU" sz="1600" dirty="0">
+                <a:solidFill>
+                  <a:srgbClr val="334155"/>
+                </a:solidFill>
+                <a:latin typeface="Aptos"/>
+                <a:cs typeface="Aptos"/>
+              </a:rPr>
               <a:t>• Нужен сценарий, где аналитик меняет документы в своей ветке, а разработчик получает change.md по diff.</a:t>
             </a:r>
+            <a:endParaRPr lang="ru-RU" sz="1600" dirty="0">
+              <a:solidFill>
+                <a:srgbClr val="334155"/>
+              </a:solidFill>
+              <a:latin typeface="Aptos"/>
+              <a:cs typeface="Aptos"/>
+            </a:endParaRPr>
           </a:p>
         </p:txBody>
       </p:sp>
@@ -353,7 +417,7 @@
           </a:ln>
         </p:spPr>
         <p:txBody>
-          <a:bodyPr wrap="square" anchor="t" lIns="18288" rIns="18288" tIns="18288" bIns="18288"/>
+          <a:bodyPr wrap="square" lIns="18288" tIns="18288" rIns="18288" bIns="18288" anchor="t"/>
           <a:lstStyle/>
           <a:p>
             <a:pPr algn="l"/>
@@ -367,6 +431,13 @@
               </a:rPr>
               <a:t>Что должно измениться</a:t>
             </a:r>
+            <a:endParaRPr lang="ru-RU" sz="1600" b="1" dirty="0">
+              <a:solidFill>
+                <a:srgbClr val="1D4ED8"/>
+              </a:solidFill>
+              <a:latin typeface="Aptos"/>
+              <a:cs typeface="Aptos"/>
+            </a:endParaRPr>
           </a:p>
         </p:txBody>
       </p:sp>
@@ -394,7 +465,7 @@
           </a:ln>
         </p:spPr>
         <p:txBody>
-          <a:bodyPr wrap="square" anchor="ctr" lIns="36576" rIns="36576" tIns="36576" bIns="36576"/>
+          <a:bodyPr wrap="square" lIns="36576" tIns="36576" rIns="36576" bIns="36576" anchor="ctr"/>
           <a:lstStyle/>
           <a:p>
             <a:pPr algn="ctr"/>
@@ -408,6 +479,13 @@
               </a:rPr>
               <a:t>1. Master spec = папка документов</a:t>
             </a:r>
+            <a:endParaRPr lang="ru-RU" sz="1300" b="1" dirty="0">
+              <a:solidFill>
+                <a:srgbClr val="1E3A8A"/>
+              </a:solidFill>
+              <a:latin typeface="Aptos"/>
+              <a:cs typeface="Aptos"/>
+            </a:endParaRPr>
           </a:p>
         </p:txBody>
       </p:sp>
@@ -435,7 +513,7 @@
           </a:ln>
         </p:spPr>
         <p:txBody>
-          <a:bodyPr wrap="square" anchor="ctr" lIns="36576" rIns="36576" tIns="36576" bIns="36576"/>
+          <a:bodyPr wrap="square" lIns="36576" tIns="36576" rIns="36576" bIns="36576" anchor="ctr"/>
           <a:lstStyle/>
           <a:p>
             <a:pPr algn="ctr"/>
@@ -449,6 +527,13 @@
               </a:rPr>
               <a:t>2. Навигация через _sdd/manifest</a:t>
             </a:r>
+            <a:endParaRPr lang="ru-RU" sz="1300" b="1" dirty="0">
+              <a:solidFill>
+                <a:srgbClr val="075985"/>
+              </a:solidFill>
+              <a:latin typeface="Aptos"/>
+              <a:cs typeface="Aptos"/>
+            </a:endParaRPr>
           </a:p>
         </p:txBody>
       </p:sp>
@@ -476,7 +561,7 @@
           </a:ln>
         </p:spPr>
         <p:txBody>
-          <a:bodyPr wrap="square" anchor="ctr" lIns="36576" rIns="36576" tIns="36576" bIns="36576"/>
+          <a:bodyPr wrap="square" lIns="36576" tIns="36576" rIns="36576" bIns="36576" anchor="ctr"/>
           <a:lstStyle/>
           <a:p>
             <a:pPr algn="ctr"/>
@@ -490,6 +575,13 @@
               </a:rPr>
               <a:t>3. change.md из diff веток</a:t>
             </a:r>
+            <a:endParaRPr lang="ru-RU" sz="1300" b="1" dirty="0">
+              <a:solidFill>
+                <a:srgbClr val="166534"/>
+              </a:solidFill>
+              <a:latin typeface="Aptos"/>
+              <a:cs typeface="Aptos"/>
+            </a:endParaRPr>
           </a:p>
         </p:txBody>
       </p:sp>
@@ -513,20 +605,17 @@
           </a:ln>
         </p:spPr>
         <p:txBody>
-          <a:bodyPr wrap="square" anchor="t" lIns="18288" rIns="18288" tIns="18288" bIns="18288"/>
-          <a:lstStyle/>
-          <a:p>
-            <a:pPr algn="l"/>
-            <a:r>
-              <a:rPr lang="ru-RU" sz="1300" b="1" dirty="0">
-                <a:solidFill>
-                  <a:srgbClr val="475569"/>
-                </a:solidFill>
-                <a:latin typeface="Aptos"/>
-                <a:cs typeface="Aptos"/>
-              </a:rPr>
-              <a:t>История доработок: c0ec340 — планы → e54f0a2 — фаза 1 → e0ec3e1 — фаза 2</a:t>
-            </a:r>
+          <a:bodyPr wrap="square" lIns="18288" tIns="18288" rIns="18288" bIns="18288" anchor="t"/>
+          <a:lstStyle/>
+          <a:p>
+            <a:pPr algn="l"/>
+            <a:endParaRPr lang="ru-RU" sz="1300" b="1" dirty="0">
+              <a:solidFill>
+                <a:srgbClr val="475569"/>
+              </a:solidFill>
+              <a:latin typeface="Aptos"/>
+              <a:cs typeface="Aptos"/>
+            </a:endParaRPr>
           </a:p>
         </p:txBody>
       </p:sp>
@@ -550,7 +639,7 @@
           </a:ln>
         </p:spPr>
         <p:txBody>
-          <a:bodyPr wrap="square" anchor="t" lIns="18288" rIns="18288" tIns="18288" bIns="18288"/>
+          <a:bodyPr wrap="square" lIns="18288" tIns="18288" rIns="18288" bIns="18288" anchor="t"/>
           <a:lstStyle/>
           <a:p>
             <a:pPr algn="l"/>
@@ -564,6 +653,13 @@
               </a:rPr>
               <a:t>Источник: docs/sdd/PROBLEM.md, docs/sdd/SDD_DETAILS.md, docs/sdd/skills/README.md</a:t>
             </a:r>
+            <a:endParaRPr lang="ru-RU" sz="700" dirty="0">
+              <a:solidFill>
+                <a:srgbClr val="64748B"/>
+              </a:solidFill>
+              <a:latin typeface="Aptos"/>
+              <a:cs typeface="Aptos"/>
+            </a:endParaRPr>
           </a:p>
         </p:txBody>
       </p:sp>
@@ -583,6 +679,7 @@
         <a:solidFill>
           <a:srgbClr val="F8FAFC"/>
         </a:solidFill>
+        <a:effectLst/>
       </p:bgPr>
     </p:bg>
     <p:spTree>
@@ -643,7 +740,7 @@
           </a:ln>
         </p:spPr>
         <p:txBody>
-          <a:bodyPr wrap="square" anchor="t" lIns="18288" rIns="18288" tIns="18288" bIns="18288"/>
+          <a:bodyPr wrap="square" lIns="18288" tIns="18288" rIns="18288" bIns="18288" anchor="t"/>
           <a:lstStyle/>
           <a:p>
             <a:pPr algn="l"/>
@@ -657,6 +754,13 @@
               </a:rPr>
               <a:t>До доработки: процесс упирался в single-file master spec</a:t>
             </a:r>
+            <a:endParaRPr lang="ru-RU" sz="3000" b="1" dirty="0">
+              <a:solidFill>
+                <a:srgbClr val="0F172A"/>
+              </a:solidFill>
+              <a:latin typeface="Aptos"/>
+              <a:cs typeface="Aptos"/>
+            </a:endParaRPr>
           </a:p>
         </p:txBody>
       </p:sp>
@@ -680,7 +784,7 @@
           </a:ln>
         </p:spPr>
         <p:txBody>
-          <a:bodyPr wrap="square" anchor="t" lIns="18288" rIns="18288" tIns="18288" bIns="18288"/>
+          <a:bodyPr wrap="square" lIns="18288" tIns="18288" rIns="18288" bIns="18288" anchor="t"/>
           <a:lstStyle/>
           <a:p>
             <a:pPr algn="l"/>
@@ -694,6 +798,13 @@
               </a:rPr>
               <a:t>Исходная модель сохраняла полезную цепочку change → design → tasks, но source of truth был одним файлом.</a:t>
             </a:r>
+            <a:endParaRPr lang="ru-RU" sz="1800" dirty="0">
+              <a:solidFill>
+                <a:srgbClr val="334155"/>
+              </a:solidFill>
+              <a:latin typeface="Aptos"/>
+              <a:cs typeface="Aptos"/>
+            </a:endParaRPr>
           </a:p>
         </p:txBody>
       </p:sp>
@@ -721,7 +832,7 @@
           </a:ln>
         </p:spPr>
         <p:txBody>
-          <a:bodyPr wrap="square" anchor="ctr" lIns="36576" rIns="36576" tIns="36576" bIns="36576"/>
+          <a:bodyPr wrap="square" lIns="36576" tIns="36576" rIns="36576" bIns="36576" anchor="ctr"/>
           <a:lstStyle/>
           <a:p>
             <a:pPr algn="ctr"/>
@@ -735,6 +846,13 @@
               </a:rPr>
               <a:t>teach</a:t>
             </a:r>
+            <a:endParaRPr lang="ru-RU" sz="900" b="1" dirty="0">
+              <a:solidFill>
+                <a:srgbClr val="0F172A"/>
+              </a:solidFill>
+              <a:latin typeface="Aptos"/>
+              <a:cs typeface="Aptos"/>
+            </a:endParaRPr>
           </a:p>
         </p:txBody>
       </p:sp>
@@ -786,7 +904,7 @@
           </a:ln>
         </p:spPr>
         <p:txBody>
-          <a:bodyPr wrap="square" anchor="ctr" lIns="36576" rIns="36576" tIns="36576" bIns="36576"/>
+          <a:bodyPr wrap="square" lIns="36576" tIns="36576" rIns="36576" bIns="36576" anchor="ctr"/>
           <a:lstStyle/>
           <a:p>
             <a:pPr algn="ctr"/>
@@ -800,6 +918,13 @@
               </a:rPr>
               <a:t>new-spec</a:t>
             </a:r>
+            <a:endParaRPr lang="ru-RU" sz="900" b="1" dirty="0">
+              <a:solidFill>
+                <a:srgbClr val="991B1B"/>
+              </a:solidFill>
+              <a:latin typeface="Aptos"/>
+              <a:cs typeface="Aptos"/>
+            </a:endParaRPr>
           </a:p>
         </p:txBody>
       </p:sp>
@@ -851,7 +976,7 @@
           </a:ln>
         </p:spPr>
         <p:txBody>
-          <a:bodyPr wrap="square" anchor="ctr" lIns="36576" rIns="36576" tIns="36576" bIns="36576"/>
+          <a:bodyPr wrap="square" lIns="36576" tIns="36576" rIns="36576" bIns="36576" anchor="ctr"/>
           <a:lstStyle/>
           <a:p>
             <a:pPr algn="ctr"/>
@@ -865,6 +990,13 @@
               </a:rPr>
               <a:t>propose</a:t>
             </a:r>
+            <a:endParaRPr lang="ru-RU" sz="900" b="1" dirty="0">
+              <a:solidFill>
+                <a:srgbClr val="0F172A"/>
+              </a:solidFill>
+              <a:latin typeface="Aptos"/>
+              <a:cs typeface="Aptos"/>
+            </a:endParaRPr>
           </a:p>
         </p:txBody>
       </p:sp>
@@ -916,7 +1048,7 @@
           </a:ln>
         </p:spPr>
         <p:txBody>
-          <a:bodyPr wrap="square" anchor="ctr" lIns="36576" rIns="36576" tIns="36576" bIns="36576"/>
+          <a:bodyPr wrap="square" lIns="36576" tIns="36576" rIns="36576" bIns="36576" anchor="ctr"/>
           <a:lstStyle/>
           <a:p>
             <a:pPr algn="ctr"/>
@@ -930,6 +1062,13 @@
               </a:rPr>
               <a:t>review/approve</a:t>
             </a:r>
+            <a:endParaRPr lang="ru-RU" sz="900" b="1" dirty="0">
+              <a:solidFill>
+                <a:srgbClr val="0F172A"/>
+              </a:solidFill>
+              <a:latin typeface="Aptos"/>
+              <a:cs typeface="Aptos"/>
+            </a:endParaRPr>
           </a:p>
         </p:txBody>
       </p:sp>
@@ -981,7 +1120,7 @@
           </a:ln>
         </p:spPr>
         <p:txBody>
-          <a:bodyPr wrap="square" anchor="ctr" lIns="36576" rIns="36576" tIns="36576" bIns="36576"/>
+          <a:bodyPr wrap="square" lIns="36576" tIns="36576" rIns="36576" bIns="36576" anchor="ctr"/>
           <a:lstStyle/>
           <a:p>
             <a:pPr algn="ctr"/>
@@ -995,6 +1134,13 @@
               </a:rPr>
               <a:t>design?</a:t>
             </a:r>
+            <a:endParaRPr lang="ru-RU" sz="900" b="1" dirty="0">
+              <a:solidFill>
+                <a:srgbClr val="0F172A"/>
+              </a:solidFill>
+              <a:latin typeface="Aptos"/>
+              <a:cs typeface="Aptos"/>
+            </a:endParaRPr>
           </a:p>
         </p:txBody>
       </p:sp>
@@ -1046,7 +1192,7 @@
           </a:ln>
         </p:spPr>
         <p:txBody>
-          <a:bodyPr wrap="square" anchor="ctr" lIns="36576" rIns="36576" tIns="36576" bIns="36576"/>
+          <a:bodyPr wrap="square" lIns="36576" tIns="36576" rIns="36576" bIns="36576" anchor="ctr"/>
           <a:lstStyle/>
           <a:p>
             <a:pPr algn="ctr"/>
@@ -1060,6 +1206,13 @@
               </a:rPr>
               <a:t>implement</a:t>
             </a:r>
+            <a:endParaRPr lang="ru-RU" sz="900" b="1" dirty="0">
+              <a:solidFill>
+                <a:srgbClr val="0F172A"/>
+              </a:solidFill>
+              <a:latin typeface="Aptos"/>
+              <a:cs typeface="Aptos"/>
+            </a:endParaRPr>
           </a:p>
         </p:txBody>
       </p:sp>
@@ -1111,7 +1264,7 @@
           </a:ln>
         </p:spPr>
         <p:txBody>
-          <a:bodyPr wrap="square" anchor="ctr" lIns="36576" rIns="36576" tIns="36576" bIns="36576"/>
+          <a:bodyPr wrap="square" lIns="36576" tIns="36576" rIns="36576" bIns="36576" anchor="ctr"/>
           <a:lstStyle/>
           <a:p>
             <a:pPr algn="ctr"/>
@@ -1125,6 +1278,13 @@
               </a:rPr>
               <a:t>apply-change</a:t>
             </a:r>
+            <a:endParaRPr lang="ru-RU" sz="900" b="1" dirty="0">
+              <a:solidFill>
+                <a:srgbClr val="9A3412"/>
+              </a:solidFill>
+              <a:latin typeface="Aptos"/>
+              <a:cs typeface="Aptos"/>
+            </a:endParaRPr>
           </a:p>
         </p:txBody>
       </p:sp>
@@ -1176,7 +1336,7 @@
           </a:ln>
         </p:spPr>
         <p:txBody>
-          <a:bodyPr wrap="square" anchor="ctr" lIns="36576" rIns="36576" tIns="36576" bIns="36576"/>
+          <a:bodyPr wrap="square" lIns="36576" tIns="36576" rIns="36576" bIns="36576" anchor="ctr"/>
           <a:lstStyle/>
           <a:p>
             <a:pPr algn="ctr"/>
@@ -1190,6 +1350,13 @@
               </a:rPr>
               <a:t>archive</a:t>
             </a:r>
+            <a:endParaRPr lang="ru-RU" sz="900" b="1" dirty="0">
+              <a:solidFill>
+                <a:srgbClr val="0F172A"/>
+              </a:solidFill>
+              <a:latin typeface="Aptos"/>
+              <a:cs typeface="Aptos"/>
+            </a:endParaRPr>
           </a:p>
         </p:txBody>
       </p:sp>
@@ -1218,7 +1385,7 @@
           </a:ln>
         </p:spPr>
         <p:txBody>
-          <a:bodyPr wrap="square" anchor="ctr" lIns="73152" rIns="73152" tIns="73152" bIns="73152"/>
+          <a:bodyPr wrap="square" lIns="73152" tIns="73152" rIns="73152" bIns="73152" anchor="ctr"/>
           <a:lstStyle/>
           <a:p>
             <a:pPr algn="ctr"/>
@@ -1232,6 +1399,13 @@
               </a:rPr>
               <a:t>explore (read-only)</a:t>
             </a:r>
+            <a:endParaRPr lang="ru-RU" sz="1200" b="1" dirty="0">
+              <a:solidFill>
+                <a:srgbClr val="475569"/>
+              </a:solidFill>
+              <a:latin typeface="Aptos"/>
+              <a:cs typeface="Aptos"/>
+            </a:endParaRPr>
           </a:p>
         </p:txBody>
       </p:sp>
@@ -1259,7 +1433,7 @@
           </a:ln>
         </p:spPr>
         <p:txBody>
-          <a:bodyPr wrap="square" anchor="ctr" lIns="27432" rIns="27432" tIns="27432" bIns="27432"/>
+          <a:bodyPr wrap="square" lIns="27432" tIns="27432" rIns="27432" bIns="27432" anchor="ctr"/>
           <a:lstStyle/>
           <a:p>
             <a:pPr algn="ctr"/>
@@ -1273,6 +1447,13 @@
               </a:rPr>
               <a:t>узкое место: один огромный md</a:t>
             </a:r>
+            <a:endParaRPr lang="ru-RU" sz="1000" b="1" dirty="0">
+              <a:solidFill>
+                <a:srgbClr val="991B1B"/>
+              </a:solidFill>
+              <a:latin typeface="Aptos"/>
+              <a:cs typeface="Aptos"/>
+            </a:endParaRPr>
           </a:p>
         </p:txBody>
       </p:sp>
@@ -1300,7 +1481,7 @@
           </a:ln>
         </p:spPr>
         <p:txBody>
-          <a:bodyPr wrap="square" anchor="ctr" lIns="27432" rIns="27432" tIns="27432" bIns="27432"/>
+          <a:bodyPr wrap="square" lIns="27432" tIns="27432" rIns="27432" bIns="27432" anchor="ctr"/>
           <a:lstStyle/>
           <a:p>
             <a:pPr algn="ctr"/>
@@ -1314,6 +1495,13 @@
               </a:rPr>
               <a:t>финальный merge в spec file</a:t>
             </a:r>
+            <a:endParaRPr lang="ru-RU" sz="1000" b="1" dirty="0">
+              <a:solidFill>
+                <a:srgbClr val="9A3412"/>
+              </a:solidFill>
+              <a:latin typeface="Aptos"/>
+              <a:cs typeface="Aptos"/>
+            </a:endParaRPr>
           </a:p>
         </p:txBody>
       </p:sp>
@@ -1341,7 +1529,7 @@
           </a:ln>
         </p:spPr>
         <p:txBody>
-          <a:bodyPr wrap="square" anchor="t" lIns="91440" rIns="91440" tIns="91440" bIns="91440"/>
+          <a:bodyPr wrap="square" lIns="91440" tIns="91440" rIns="91440" bIns="91440" anchor="t"/>
           <a:lstStyle/>
           <a:p>
             <a:pPr algn="l"/>
@@ -1355,6 +1543,13 @@
               </a:rPr>
               <a:t>Почему это не закрывает специальные сценарии</a:t>
             </a:r>
+            <a:endParaRPr lang="ru-RU" sz="1500" b="1" dirty="0">
+              <a:solidFill>
+                <a:srgbClr val="0F172A"/>
+              </a:solidFill>
+              <a:latin typeface="Aptos"/>
+              <a:cs typeface="Aptos"/>
+            </a:endParaRPr>
           </a:p>
           <a:p>
             <a:pPr algn="l"/>
@@ -1368,6 +1563,13 @@
               </a:rPr>
               <a:t>• папочная документация команды не подключается как полноценная master specification</a:t>
             </a:r>
+            <a:endParaRPr lang="ru-RU" sz="1300" dirty="0">
+              <a:solidFill>
+                <a:srgbClr val="334155"/>
+              </a:solidFill>
+              <a:latin typeface="Aptos"/>
+              <a:cs typeface="Aptos"/>
+            </a:endParaRPr>
           </a:p>
           <a:p>
             <a:pPr algn="l"/>
@@ -1381,6 +1583,13 @@
               </a:rPr>
               <a:t>• change.md нельзя получить из уже сделанных правок аналитика в отдельной ветке</a:t>
             </a:r>
+            <a:endParaRPr lang="ru-RU" sz="1300" dirty="0">
+              <a:solidFill>
+                <a:srgbClr val="334155"/>
+              </a:solidFill>
+              <a:latin typeface="Aptos"/>
+              <a:cs typeface="Aptos"/>
+            </a:endParaRPr>
           </a:p>
           <a:p>
             <a:pPr algn="l"/>
@@ -1394,6 +1603,13 @@
               </a:rPr>
               <a:t>• apply-change может пытаться повторно вливать то, что уже является source of truth в ветке аналитика</a:t>
             </a:r>
+            <a:endParaRPr lang="ru-RU" sz="1300" dirty="0">
+              <a:solidFill>
+                <a:srgbClr val="334155"/>
+              </a:solidFill>
+              <a:latin typeface="Aptos"/>
+              <a:cs typeface="Aptos"/>
+            </a:endParaRPr>
           </a:p>
         </p:txBody>
       </p:sp>
@@ -1417,7 +1633,7 @@
           </a:ln>
         </p:spPr>
         <p:txBody>
-          <a:bodyPr wrap="square" anchor="t" lIns="18288" rIns="18288" tIns="18288" bIns="18288"/>
+          <a:bodyPr wrap="square" lIns="18288" tIns="18288" rIns="18288" bIns="18288" anchor="t"/>
           <a:lstStyle/>
           <a:p>
             <a:pPr algn="l"/>
@@ -1431,6 +1647,13 @@
               </a:rPr>
               <a:t>Источник: docs/sdd/PROBLEM.md, docs/sdd/SDD_DETAILS.md, docs/sdd/skills/README.md</a:t>
             </a:r>
+            <a:endParaRPr lang="ru-RU" sz="700" dirty="0">
+              <a:solidFill>
+                <a:srgbClr val="64748B"/>
+              </a:solidFill>
+              <a:latin typeface="Aptos"/>
+              <a:cs typeface="Aptos"/>
+            </a:endParaRPr>
           </a:p>
         </p:txBody>
       </p:sp>
@@ -1450,6 +1673,7 @@
         <a:solidFill>
           <a:srgbClr val="F8FAFC"/>
         </a:solidFill>
+        <a:effectLst/>
       </p:bgPr>
     </p:bg>
     <p:spTree>
@@ -1510,7 +1734,7 @@
           </a:ln>
         </p:spPr>
         <p:txBody>
-          <a:bodyPr wrap="square" anchor="t" lIns="18288" rIns="18288" tIns="18288" bIns="18288"/>
+          <a:bodyPr wrap="square" lIns="18288" tIns="18288" rIns="18288" bIns="18288" anchor="t"/>
           <a:lstStyle/>
           <a:p>
             <a:pPr algn="l"/>
@@ -1524,6 +1748,13 @@
               </a:rPr>
               <a:t>Фаза 1: master specification становится папкой</a:t>
             </a:r>
+            <a:endParaRPr lang="ru-RU" sz="3000" b="1" dirty="0">
+              <a:solidFill>
+                <a:srgbClr val="0F172A"/>
+              </a:solidFill>
+              <a:latin typeface="Aptos"/>
+              <a:cs typeface="Aptos"/>
+            </a:endParaRPr>
           </a:p>
         </p:txBody>
       </p:sp>
@@ -1547,7 +1778,7 @@
           </a:ln>
         </p:spPr>
         <p:txBody>
-          <a:bodyPr wrap="square" anchor="t" lIns="18288" rIns="18288" tIns="18288" bIns="18288"/>
+          <a:bodyPr wrap="square" lIns="18288" tIns="18288" rIns="18288" bIns="18288" anchor="t"/>
           <a:lstStyle/>
           <a:p>
             <a:pPr algn="l"/>
@@ -1561,6 +1792,13 @@
               </a:rPr>
               <a:t>Первое изменение снимает требование “собрать один полный Markdown” и вводит навигационный слой для агентов.</a:t>
             </a:r>
+            <a:endParaRPr lang="ru-RU" sz="1700" dirty="0">
+              <a:solidFill>
+                <a:srgbClr val="334155"/>
+              </a:solidFill>
+              <a:latin typeface="Aptos"/>
+              <a:cs typeface="Aptos"/>
+            </a:endParaRPr>
           </a:p>
         </p:txBody>
       </p:sp>
@@ -1588,7 +1826,7 @@
           </a:ln>
         </p:spPr>
         <p:txBody>
-          <a:bodyPr wrap="square" anchor="t" lIns="146304" rIns="146304" tIns="146304" bIns="146304"/>
+          <a:bodyPr wrap="square" lIns="146304" tIns="146304" rIns="146304" bIns="146304" anchor="t"/>
           <a:lstStyle/>
           <a:p>
             <a:pPr algn="l"/>
@@ -1602,6 +1840,13 @@
               </a:rPr>
               <a:t>openspec/&lt;service&gt;/</a:t>
             </a:r>
+            <a:endParaRPr lang="ru-RU" sz="1500" b="1" dirty="0">
+              <a:solidFill>
+                <a:srgbClr val="E2E8F0"/>
+              </a:solidFill>
+              <a:latin typeface="Aptos"/>
+              <a:cs typeface="Aptos"/>
+            </a:endParaRPr>
           </a:p>
           <a:p>
             <a:pPr algn="l"/>
@@ -1615,6 +1860,13 @@
               </a:rPr>
               <a:t>  _sdd/</a:t>
             </a:r>
+            <a:endParaRPr lang="ru-RU" sz="1300" b="1" dirty="0">
+              <a:solidFill>
+                <a:srgbClr val="93C5FD"/>
+              </a:solidFill>
+              <a:latin typeface="Aptos"/>
+              <a:cs typeface="Aptos"/>
+            </a:endParaRPr>
           </a:p>
           <a:p>
             <a:pPr algn="l"/>
@@ -1628,6 +1880,13 @@
               </a:rPr>
               <a:t>    manifest.yaml</a:t>
             </a:r>
+            <a:endParaRPr lang="ru-RU" sz="1200" dirty="0">
+              <a:solidFill>
+                <a:srgbClr val="BFDBFE"/>
+              </a:solidFill>
+              <a:latin typeface="Aptos"/>
+              <a:cs typeface="Aptos"/>
+            </a:endParaRPr>
           </a:p>
           <a:p>
             <a:pPr algn="l"/>
@@ -1641,6 +1900,13 @@
               </a:rPr>
               <a:t>    navigation.md</a:t>
             </a:r>
+            <a:endParaRPr lang="ru-RU" sz="1200" dirty="0">
+              <a:solidFill>
+                <a:srgbClr val="BFDBFE"/>
+              </a:solidFill>
+              <a:latin typeface="Aptos"/>
+              <a:cs typeface="Aptos"/>
+            </a:endParaRPr>
           </a:p>
           <a:p>
             <a:pPr algn="l"/>
@@ -1654,6 +1920,13 @@
               </a:rPr>
               <a:t>    coverage.md</a:t>
             </a:r>
+            <a:endParaRPr lang="ru-RU" sz="1200" dirty="0">
+              <a:solidFill>
+                <a:srgbClr val="BFDBFE"/>
+              </a:solidFill>
+              <a:latin typeface="Aptos"/>
+              <a:cs typeface="Aptos"/>
+            </a:endParaRPr>
           </a:p>
           <a:p>
             <a:pPr algn="l"/>
@@ -1667,6 +1940,13 @@
               </a:rPr>
               <a:t>    stale-files.md</a:t>
             </a:r>
+            <a:endParaRPr lang="ru-RU" sz="1200" dirty="0">
+              <a:solidFill>
+                <a:srgbClr val="BFDBFE"/>
+              </a:solidFill>
+              <a:latin typeface="Aptos"/>
+              <a:cs typeface="Aptos"/>
+            </a:endParaRPr>
           </a:p>
           <a:p>
             <a:pPr algn="l"/>
@@ -1680,6 +1960,13 @@
               </a:rPr>
               <a:t>  workflow/</a:t>
             </a:r>
+            <a:endParaRPr lang="ru-RU" sz="1200" dirty="0">
+              <a:solidFill>
+                <a:srgbClr val="E2E8F0"/>
+              </a:solidFill>
+              <a:latin typeface="Aptos"/>
+              <a:cs typeface="Aptos"/>
+            </a:endParaRPr>
           </a:p>
           <a:p>
             <a:pPr algn="l"/>
@@ -1693,6 +1980,13 @@
               </a:rPr>
               <a:t>  integrations/</a:t>
             </a:r>
+            <a:endParaRPr lang="ru-RU" sz="1200" dirty="0">
+              <a:solidFill>
+                <a:srgbClr val="E2E8F0"/>
+              </a:solidFill>
+              <a:latin typeface="Aptos"/>
+              <a:cs typeface="Aptos"/>
+            </a:endParaRPr>
           </a:p>
           <a:p>
             <a:pPr algn="l"/>
@@ -1706,6 +2000,13 @@
               </a:rPr>
               <a:t>  api/ data/ security/ ...</a:t>
             </a:r>
+            <a:endParaRPr lang="ru-RU" sz="1200" dirty="0">
+              <a:solidFill>
+                <a:srgbClr val="E2E8F0"/>
+              </a:solidFill>
+              <a:latin typeface="Aptos"/>
+              <a:cs typeface="Aptos"/>
+            </a:endParaRPr>
           </a:p>
         </p:txBody>
       </p:sp>
@@ -1733,7 +2034,7 @@
           </a:ln>
         </p:spPr>
         <p:txBody>
-          <a:bodyPr wrap="square" anchor="ctr" lIns="36576" rIns="36576" tIns="36576" bIns="36576"/>
+          <a:bodyPr wrap="square" lIns="36576" tIns="36576" rIns="36576" bIns="36576" anchor="ctr"/>
           <a:lstStyle/>
           <a:p>
             <a:pPr algn="ctr"/>
@@ -1747,6 +2048,13 @@
               </a:rPr>
               <a:t>документы команды</a:t>
             </a:r>
+            <a:endParaRPr lang="ru-RU" sz="1300" b="1" dirty="0">
+              <a:solidFill>
+                <a:srgbClr val="0F172A"/>
+              </a:solidFill>
+              <a:latin typeface="Aptos"/>
+              <a:cs typeface="Aptos"/>
+            </a:endParaRPr>
           </a:p>
         </p:txBody>
       </p:sp>
@@ -1798,7 +2106,7 @@
           </a:ln>
         </p:spPr>
         <p:txBody>
-          <a:bodyPr wrap="square" anchor="ctr" lIns="36576" rIns="36576" tIns="36576" bIns="36576"/>
+          <a:bodyPr wrap="square" lIns="36576" tIns="36576" rIns="36576" bIns="36576" anchor="ctr"/>
           <a:lstStyle/>
           <a:p>
             <a:pPr algn="ctr"/>
@@ -1812,6 +2120,13 @@
               </a:rPr>
               <a:t>init-master-spec</a:t>
             </a:r>
+            <a:endParaRPr lang="ru-RU" sz="1300" b="1" dirty="0">
+              <a:solidFill>
+                <a:srgbClr val="1E3A8A"/>
+              </a:solidFill>
+              <a:latin typeface="Aptos"/>
+              <a:cs typeface="Aptos"/>
+            </a:endParaRPr>
           </a:p>
         </p:txBody>
       </p:sp>
@@ -1863,7 +2178,7 @@
           </a:ln>
         </p:spPr>
         <p:txBody>
-          <a:bodyPr wrap="square" anchor="ctr" lIns="36576" rIns="36576" tIns="36576" bIns="36576"/>
+          <a:bodyPr wrap="square" lIns="36576" tIns="36576" rIns="36576" bIns="36576" anchor="ctr"/>
           <a:lstStyle/>
           <a:p>
             <a:pPr algn="ctr"/>
@@ -1877,6 +2192,13 @@
               </a:rPr>
               <a:t>_sdd индекс</a:t>
             </a:r>
+            <a:endParaRPr lang="ru-RU" sz="1300" b="1" dirty="0">
+              <a:solidFill>
+                <a:srgbClr val="075985"/>
+              </a:solidFill>
+              <a:latin typeface="Aptos"/>
+              <a:cs typeface="Aptos"/>
+            </a:endParaRPr>
           </a:p>
         </p:txBody>
       </p:sp>
@@ -1904,7 +2226,7 @@
           </a:ln>
         </p:spPr>
         <p:txBody>
-          <a:bodyPr wrap="square" anchor="t" lIns="109728" rIns="109728" tIns="109728" bIns="109728"/>
+          <a:bodyPr wrap="square" lIns="109728" tIns="109728" rIns="109728" bIns="109728" anchor="t"/>
           <a:lstStyle/>
           <a:p>
             <a:pPr algn="l"/>
@@ -1918,6 +2240,13 @@
               </a:rPr>
               <a:t>Что получает workflow</a:t>
             </a:r>
+            <a:endParaRPr lang="ru-RU" sz="1500" b="1" dirty="0">
+              <a:solidFill>
+                <a:srgbClr val="0F172A"/>
+              </a:solidFill>
+              <a:latin typeface="Aptos"/>
+              <a:cs typeface="Aptos"/>
+            </a:endParaRPr>
           </a:p>
           <a:p>
             <a:pPr algn="l"/>
@@ -1931,6 +2260,13 @@
               </a:rPr>
               <a:t>• агент сначала читает navigation.md и manifest.yaml, а не всю папку рекурсивно</a:t>
             </a:r>
+            <a:endParaRPr lang="ru-RU" sz="1300" dirty="0">
+              <a:solidFill>
+                <a:srgbClr val="334155"/>
+              </a:solidFill>
+              <a:latin typeface="Aptos"/>
+              <a:cs typeface="Aptos"/>
+            </a:endParaRPr>
           </a:p>
           <a:p>
             <a:pPr algn="l"/>
@@ -1944,6 +2280,13 @@
               </a:rPr>
               <a:t>• coverage.md честно фиксирует пробелы и противоречия документации</a:t>
             </a:r>
+            <a:endParaRPr lang="ru-RU" sz="1300" dirty="0">
+              <a:solidFill>
+                <a:srgbClr val="334155"/>
+              </a:solidFill>
+              <a:latin typeface="Aptos"/>
+              <a:cs typeface="Aptos"/>
+            </a:endParaRPr>
           </a:p>
           <a:p>
             <a:pPr algn="l"/>
@@ -1957,6 +2300,13 @@
               </a:rPr>
               <a:t>• stale-files.md предупреждает, если manifest не соответствует файлам</a:t>
             </a:r>
+            <a:endParaRPr lang="ru-RU" sz="1300" dirty="0">
+              <a:solidFill>
+                <a:srgbClr val="334155"/>
+              </a:solidFill>
+              <a:latin typeface="Aptos"/>
+              <a:cs typeface="Aptos"/>
+            </a:endParaRPr>
           </a:p>
           <a:p>
             <a:pPr algn="l"/>
@@ -1970,6 +2320,13 @@
               </a:rPr>
               <a:t>• propose/design/implement могут ссылаться на конкретные документы master spec</a:t>
             </a:r>
+            <a:endParaRPr lang="ru-RU" sz="1300" dirty="0">
+              <a:solidFill>
+                <a:srgbClr val="334155"/>
+              </a:solidFill>
+              <a:latin typeface="Aptos"/>
+              <a:cs typeface="Aptos"/>
+            </a:endParaRPr>
           </a:p>
         </p:txBody>
       </p:sp>
@@ -1997,7 +2354,7 @@
           </a:ln>
         </p:spPr>
         <p:txBody>
-          <a:bodyPr wrap="square" anchor="ctr" lIns="27432" rIns="27432" tIns="27432" bIns="27432"/>
+          <a:bodyPr wrap="square" lIns="27432" tIns="27432" rIns="27432" bIns="27432" anchor="ctr"/>
           <a:lstStyle/>
           <a:p>
             <a:pPr algn="ctr"/>
@@ -2011,6 +2368,13 @@
               </a:rPr>
               <a:t>разница: source of truth = folder, не single md</a:t>
             </a:r>
+            <a:endParaRPr lang="ru-RU" sz="1000" b="1" dirty="0">
+              <a:solidFill>
+                <a:srgbClr val="1E3A8A"/>
+              </a:solidFill>
+              <a:latin typeface="Aptos"/>
+              <a:cs typeface="Aptos"/>
+            </a:endParaRPr>
           </a:p>
         </p:txBody>
       </p:sp>
@@ -2034,7 +2398,7 @@
           </a:ln>
         </p:spPr>
         <p:txBody>
-          <a:bodyPr wrap="square" anchor="t" lIns="18288" rIns="18288" tIns="18288" bIns="18288"/>
+          <a:bodyPr wrap="square" lIns="18288" tIns="18288" rIns="18288" bIns="18288" anchor="t"/>
           <a:lstStyle/>
           <a:p>
             <a:pPr algn="l"/>
@@ -2048,6 +2412,13 @@
               </a:rPr>
               <a:t>Источник: docs/sdd/PROBLEM.md, docs/sdd/SDD_DETAILS.md, docs/sdd/skills/README.md</a:t>
             </a:r>
+            <a:endParaRPr lang="ru-RU" sz="700" dirty="0">
+              <a:solidFill>
+                <a:srgbClr val="64748B"/>
+              </a:solidFill>
+              <a:latin typeface="Aptos"/>
+              <a:cs typeface="Aptos"/>
+            </a:endParaRPr>
           </a:p>
         </p:txBody>
       </p:sp>
@@ -2067,6 +2438,7 @@
         <a:solidFill>
           <a:srgbClr val="F8FAFC"/>
         </a:solidFill>
+        <a:effectLst/>
       </p:bgPr>
     </p:bg>
     <p:spTree>
@@ -2127,7 +2499,7 @@
           </a:ln>
         </p:spPr>
         <p:txBody>
-          <a:bodyPr wrap="square" anchor="t" lIns="18288" rIns="18288" tIns="18288" bIns="18288"/>
+          <a:bodyPr wrap="square" lIns="18288" tIns="18288" rIns="18288" bIns="18288" anchor="t"/>
           <a:lstStyle/>
           <a:p>
             <a:pPr algn="l"/>
@@ -2141,6 +2513,13 @@
               </a:rPr>
               <a:t>Фаза 2: change.md из diff веток аналитика</a:t>
             </a:r>
+            <a:endParaRPr lang="ru-RU" sz="3000" b="1" dirty="0">
+              <a:solidFill>
+                <a:srgbClr val="0F172A"/>
+              </a:solidFill>
+              <a:latin typeface="Aptos"/>
+              <a:cs typeface="Aptos"/>
+            </a:endParaRPr>
           </a:p>
         </p:txBody>
       </p:sp>
@@ -2164,7 +2543,7 @@
           </a:ln>
         </p:spPr>
         <p:txBody>
-          <a:bodyPr wrap="square" anchor="t" lIns="18288" rIns="18288" tIns="18288" bIns="18288"/>
+          <a:bodyPr wrap="square" lIns="18288" tIns="18288" rIns="18288" bIns="18288" anchor="t"/>
           <a:lstStyle/>
           <a:p>
             <a:pPr algn="l"/>
@@ -2178,6 +2557,13 @@
               </a:rPr>
               <a:t>Второе изменение закрывает сценарий, где аналитик уже изменил master-spec documents в отдельной локальной ветке/ref.</a:t>
             </a:r>
+            <a:endParaRPr lang="ru-RU" sz="1700" dirty="0">
+              <a:solidFill>
+                <a:srgbClr val="334155"/>
+              </a:solidFill>
+              <a:latin typeface="Aptos"/>
+              <a:cs typeface="Aptos"/>
+            </a:endParaRPr>
           </a:p>
         </p:txBody>
       </p:sp>
@@ -2205,7 +2591,7 @@
           </a:ln>
         </p:spPr>
         <p:txBody>
-          <a:bodyPr wrap="square" anchor="ctr" lIns="36576" rIns="36576" tIns="36576" bIns="36576"/>
+          <a:bodyPr wrap="square" lIns="36576" tIns="36576" rIns="36576" bIns="36576" anchor="ctr"/>
           <a:lstStyle/>
           <a:p>
             <a:pPr algn="ctr"/>
@@ -2219,6 +2605,13 @@
               </a:rPr>
               <a:t>base_ref: релизная/базовая ветка</a:t>
             </a:r>
+            <a:endParaRPr lang="ru-RU" sz="1200" b="1" dirty="0">
+              <a:solidFill>
+                <a:srgbClr val="0F172A"/>
+              </a:solidFill>
+              <a:latin typeface="Aptos"/>
+              <a:cs typeface="Aptos"/>
+            </a:endParaRPr>
           </a:p>
         </p:txBody>
       </p:sp>
@@ -2246,7 +2639,7 @@
           </a:ln>
         </p:spPr>
         <p:txBody>
-          <a:bodyPr wrap="square" anchor="ctr" lIns="36576" rIns="36576" tIns="36576" bIns="36576"/>
+          <a:bodyPr wrap="square" lIns="36576" tIns="36576" rIns="36576" bIns="36576" anchor="ctr"/>
           <a:lstStyle/>
           <a:p>
             <a:pPr algn="ctr"/>
@@ -2260,6 +2653,13 @@
               </a:rPr>
               <a:t>analyst_ref: ветка с измененной master spec</a:t>
             </a:r>
+            <a:endParaRPr lang="ru-RU" sz="1200" b="1" dirty="0">
+              <a:solidFill>
+                <a:srgbClr val="166534"/>
+              </a:solidFill>
+              <a:latin typeface="Aptos"/>
+              <a:cs typeface="Aptos"/>
+            </a:endParaRPr>
           </a:p>
         </p:txBody>
       </p:sp>
@@ -2311,7 +2711,7 @@
           </a:ln>
         </p:spPr>
         <p:txBody>
-          <a:bodyPr wrap="square" anchor="ctr" lIns="36576" rIns="36576" tIns="36576" bIns="36576"/>
+          <a:bodyPr wrap="square" lIns="36576" tIns="36576" rIns="36576" bIns="36576" anchor="ctr"/>
           <a:lstStyle/>
           <a:p>
             <a:pPr algn="ctr"/>
@@ -2325,6 +2725,13 @@
               </a:rPr>
               <a:t>git diff -- openspec/&lt;service&gt;/</a:t>
             </a:r>
+            <a:endParaRPr lang="ru-RU" sz="1200" b="1" dirty="0">
+              <a:solidFill>
+                <a:srgbClr val="166534"/>
+              </a:solidFill>
+              <a:latin typeface="Aptos"/>
+              <a:cs typeface="Aptos"/>
+            </a:endParaRPr>
           </a:p>
         </p:txBody>
       </p:sp>
@@ -2376,7 +2783,7 @@
           </a:ln>
         </p:spPr>
         <p:txBody>
-          <a:bodyPr wrap="square" anchor="ctr" lIns="36576" rIns="36576" tIns="36576" bIns="36576"/>
+          <a:bodyPr wrap="square" lIns="36576" tIns="36576" rIns="36576" bIns="36576" anchor="ctr"/>
           <a:lstStyle/>
           <a:p>
             <a:pPr algn="ctr"/>
@@ -2390,6 +2797,13 @@
               </a:rPr>
               <a:t>change.md + .spec-diff/</a:t>
             </a:r>
+            <a:endParaRPr lang="ru-RU" sz="1200" b="1" dirty="0">
+              <a:solidFill>
+                <a:srgbClr val="166534"/>
+              </a:solidFill>
+              <a:latin typeface="Aptos"/>
+              <a:cs typeface="Aptos"/>
+            </a:endParaRPr>
           </a:p>
         </p:txBody>
       </p:sp>
@@ -2441,7 +2855,7 @@
           </a:ln>
         </p:spPr>
         <p:txBody>
-          <a:bodyPr wrap="square" anchor="ctr" lIns="36576" rIns="36576" tIns="36576" bIns="36576"/>
+          <a:bodyPr wrap="square" lIns="36576" tIns="36576" rIns="36576" bIns="36576" anchor="ctr"/>
           <a:lstStyle/>
           <a:p>
             <a:pPr algn="ctr"/>
@@ -2455,6 +2869,13 @@
               </a:rPr>
               <a:t>design/tasks → implement</a:t>
             </a:r>
+            <a:endParaRPr lang="ru-RU" sz="1200" b="1" dirty="0">
+              <a:solidFill>
+                <a:srgbClr val="0F172A"/>
+              </a:solidFill>
+              <a:latin typeface="Aptos"/>
+              <a:cs typeface="Aptos"/>
+            </a:endParaRPr>
           </a:p>
         </p:txBody>
       </p:sp>
@@ -2482,7 +2903,7 @@
           </a:ln>
         </p:spPr>
         <p:txBody>
-          <a:bodyPr wrap="square" anchor="ctr" lIns="36576" rIns="36576" tIns="36576" bIns="36576"/>
+          <a:bodyPr wrap="square" lIns="36576" tIns="36576" rIns="36576" bIns="36576" anchor="ctr"/>
           <a:lstStyle/>
           <a:p>
             <a:pPr algn="ctr"/>
@@ -2496,6 +2917,13 @@
               </a:rPr>
               <a:t>verify source, не auto-merge</a:t>
             </a:r>
+            <a:endParaRPr lang="ru-RU" sz="1200" b="1" dirty="0">
+              <a:solidFill>
+                <a:srgbClr val="92400E"/>
+              </a:solidFill>
+              <a:latin typeface="Aptos"/>
+              <a:cs typeface="Aptos"/>
+            </a:endParaRPr>
           </a:p>
         </p:txBody>
       </p:sp>
@@ -2523,7 +2951,7 @@
           </a:ln>
         </p:spPr>
         <p:txBody>
-          <a:bodyPr wrap="square" anchor="t" lIns="109728" rIns="109728" tIns="109728" bIns="109728"/>
+          <a:bodyPr wrap="square" lIns="109728" tIns="109728" rIns="109728" bIns="109728" anchor="t"/>
           <a:lstStyle/>
           <a:p>
             <a:pPr algn="l"/>
@@ -2537,6 +2965,13 @@
               </a:rPr>
               <a:t>Guardrails</a:t>
             </a:r>
+            <a:endParaRPr lang="ru-RU" sz="1500" b="1" dirty="0">
+              <a:solidFill>
+                <a:srgbClr val="0F172A"/>
+              </a:solidFill>
+              <a:latin typeface="Aptos"/>
+              <a:cs typeface="Aptos"/>
+            </a:endParaRPr>
           </a:p>
           <a:p>
             <a:pPr algn="l"/>
@@ -2550,6 +2985,13 @@
               </a:rPr>
               <a:t>• refs проверяются только локально через git rev-parse</a:t>
             </a:r>
+            <a:endParaRPr lang="ru-RU" sz="1200" dirty="0">
+              <a:solidFill>
+                <a:srgbClr val="334155"/>
+              </a:solidFill>
+              <a:latin typeface="Aptos"/>
+              <a:cs typeface="Aptos"/>
+            </a:endParaRPr>
           </a:p>
           <a:p>
             <a:pPr algn="l"/>
@@ -2563,6 +3005,13 @@
               </a:rPr>
               <a:t>• framework не делает fetch, pull и checkout веток</a:t>
             </a:r>
+            <a:endParaRPr lang="ru-RU" sz="1200" dirty="0">
+              <a:solidFill>
+                <a:srgbClr val="334155"/>
+              </a:solidFill>
+              <a:latin typeface="Aptos"/>
+              <a:cs typeface="Aptos"/>
+            </a:endParaRPr>
           </a:p>
           <a:p>
             <a:pPr algn="l"/>
@@ -2576,6 +3025,13 @@
               </a:rPr>
               <a:t>• документы читаются через git show &lt;ref&gt;:&lt;path&gt;</a:t>
             </a:r>
+            <a:endParaRPr lang="ru-RU" sz="1200" dirty="0">
+              <a:solidFill>
+                <a:srgbClr val="334155"/>
+              </a:solidFill>
+              <a:latin typeface="Aptos"/>
+              <a:cs typeface="Aptos"/>
+            </a:endParaRPr>
           </a:p>
           <a:p>
             <a:pPr algn="l"/>
@@ -2589,6 +3045,13 @@
               </a:rPr>
               <a:t>• default diff mode: three-dot; two-dot только явно</a:t>
             </a:r>
+            <a:endParaRPr lang="ru-RU" sz="1200" dirty="0">
+              <a:solidFill>
+                <a:srgbClr val="334155"/>
+              </a:solidFill>
+              <a:latin typeface="Aptos"/>
+              <a:cs typeface="Aptos"/>
+            </a:endParaRPr>
           </a:p>
         </p:txBody>
       </p:sp>
@@ -2616,7 +3079,7 @@
           </a:ln>
         </p:spPr>
         <p:txBody>
-          <a:bodyPr wrap="square" anchor="t" lIns="109728" rIns="109728" tIns="109728" bIns="109728"/>
+          <a:bodyPr wrap="square" lIns="109728" tIns="109728" rIns="109728" bIns="109728" anchor="t"/>
           <a:lstStyle/>
           <a:p>
             <a:pPr algn="l"/>
@@ -2630,6 +3093,13 @@
               </a:rPr>
               <a:t>Специальный сценарий теперь штатный</a:t>
             </a:r>
+            <a:endParaRPr lang="ru-RU" sz="1400" b="1" dirty="0">
+              <a:solidFill>
+                <a:srgbClr val="166534"/>
+              </a:solidFill>
+              <a:latin typeface="Aptos"/>
+              <a:cs typeface="Aptos"/>
+            </a:endParaRPr>
           </a:p>
           <a:p>
             <a:pPr algn="l"/>
@@ -2643,6 +3113,13 @@
               </a:rPr>
               <a:t>Разработчик может быть в своей ветке: change генерируется по base_ref и analyst_ref без переключения рабочей копии.</a:t>
             </a:r>
+            <a:endParaRPr lang="ru-RU" sz="1200" dirty="0">
+              <a:solidFill>
+                <a:srgbClr val="334155"/>
+              </a:solidFill>
+              <a:latin typeface="Aptos"/>
+              <a:cs typeface="Aptos"/>
+            </a:endParaRPr>
           </a:p>
         </p:txBody>
       </p:sp>
@@ -2666,7 +3143,7 @@
           </a:ln>
         </p:spPr>
         <p:txBody>
-          <a:bodyPr wrap="square" anchor="t" lIns="18288" rIns="18288" tIns="18288" bIns="18288"/>
+          <a:bodyPr wrap="square" lIns="18288" tIns="18288" rIns="18288" bIns="18288" anchor="t"/>
           <a:lstStyle/>
           <a:p>
             <a:pPr algn="l"/>
@@ -2680,6 +3157,13 @@
               </a:rPr>
               <a:t>Источник: docs/sdd/PROBLEM.md, docs/sdd/SDD_DETAILS.md, docs/sdd/skills/README.md</a:t>
             </a:r>
+            <a:endParaRPr lang="ru-RU" sz="700" dirty="0">
+              <a:solidFill>
+                <a:srgbClr val="64748B"/>
+              </a:solidFill>
+              <a:latin typeface="Aptos"/>
+              <a:cs typeface="Aptos"/>
+            </a:endParaRPr>
           </a:p>
         </p:txBody>
       </p:sp>
@@ -2699,6 +3183,7 @@
         <a:solidFill>
           <a:srgbClr val="F8FAFC"/>
         </a:solidFill>
+        <a:effectLst/>
       </p:bgPr>
     </p:bg>
     <p:spTree>
@@ -2759,7 +3244,7 @@
           </a:ln>
         </p:spPr>
         <p:txBody>
-          <a:bodyPr wrap="square" anchor="t" lIns="18288" rIns="18288" tIns="18288" bIns="18288"/>
+          <a:bodyPr wrap="square" lIns="18288" tIns="18288" rIns="18288" bIns="18288" anchor="t"/>
           <a:lstStyle/>
           <a:p>
             <a:pPr algn="l"/>
@@ -2773,6 +3258,13 @@
               </a:rPr>
               <a:t>После двух фаз: новый lifecycle и ключевая разница</a:t>
             </a:r>
+            <a:endParaRPr lang="ru-RU" sz="3000" b="1" dirty="0">
+              <a:solidFill>
+                <a:srgbClr val="0F172A"/>
+              </a:solidFill>
+              <a:latin typeface="Aptos"/>
+              <a:cs typeface="Aptos"/>
+            </a:endParaRPr>
           </a:p>
         </p:txBody>
       </p:sp>
@@ -2800,7 +3292,7 @@
           </a:ln>
         </p:spPr>
         <p:txBody>
-          <a:bodyPr wrap="square" anchor="ctr" lIns="36576" rIns="36576" tIns="36576" bIns="36576"/>
+          <a:bodyPr wrap="square" lIns="36576" tIns="36576" rIns="36576" bIns="36576" anchor="ctr"/>
           <a:lstStyle/>
           <a:p>
             <a:pPr algn="ctr"/>
@@ -2814,6 +3306,13 @@
               </a:rPr>
               <a:t>teach</a:t>
             </a:r>
+            <a:endParaRPr lang="ru-RU" sz="900" b="1" dirty="0">
+              <a:solidFill>
+                <a:srgbClr val="0F172A"/>
+              </a:solidFill>
+              <a:latin typeface="Aptos"/>
+              <a:cs typeface="Aptos"/>
+            </a:endParaRPr>
           </a:p>
         </p:txBody>
       </p:sp>
@@ -2865,7 +3364,7 @@
           </a:ln>
         </p:spPr>
         <p:txBody>
-          <a:bodyPr wrap="square" anchor="ctr" lIns="36576" rIns="36576" tIns="36576" bIns="36576"/>
+          <a:bodyPr wrap="square" lIns="36576" tIns="36576" rIns="36576" bIns="36576" anchor="ctr"/>
           <a:lstStyle/>
           <a:p>
             <a:pPr algn="ctr"/>
@@ -2879,6 +3378,13 @@
               </a:rPr>
               <a:t>init-master-spec</a:t>
             </a:r>
+            <a:endParaRPr lang="ru-RU" sz="900" b="1" dirty="0">
+              <a:solidFill>
+                <a:srgbClr val="1E3A8A"/>
+              </a:solidFill>
+              <a:latin typeface="Aptos"/>
+              <a:cs typeface="Aptos"/>
+            </a:endParaRPr>
           </a:p>
         </p:txBody>
       </p:sp>
@@ -2930,7 +3436,7 @@
           </a:ln>
         </p:spPr>
         <p:txBody>
-          <a:bodyPr wrap="square" anchor="ctr" lIns="36576" rIns="36576" tIns="36576" bIns="36576"/>
+          <a:bodyPr wrap="square" lIns="36576" tIns="36576" rIns="36576" bIns="36576" anchor="ctr"/>
           <a:lstStyle/>
           <a:p>
             <a:pPr algn="ctr"/>
@@ -2944,6 +3450,13 @@
               </a:rPr>
               <a:t>propose / change-from-diff</a:t>
             </a:r>
+            <a:endParaRPr lang="ru-RU" sz="900" b="1" dirty="0">
+              <a:solidFill>
+                <a:srgbClr val="166534"/>
+              </a:solidFill>
+              <a:latin typeface="Aptos"/>
+              <a:cs typeface="Aptos"/>
+            </a:endParaRPr>
           </a:p>
         </p:txBody>
       </p:sp>
@@ -2995,7 +3508,7 @@
           </a:ln>
         </p:spPr>
         <p:txBody>
-          <a:bodyPr wrap="square" anchor="ctr" lIns="36576" rIns="36576" tIns="36576" bIns="36576"/>
+          <a:bodyPr wrap="square" lIns="36576" tIns="36576" rIns="36576" bIns="36576" anchor="ctr"/>
           <a:lstStyle/>
           <a:p>
             <a:pPr algn="ctr"/>
@@ -3009,6 +3522,13 @@
               </a:rPr>
               <a:t>review/approve</a:t>
             </a:r>
+            <a:endParaRPr lang="ru-RU" sz="900" b="1" dirty="0">
+              <a:solidFill>
+                <a:srgbClr val="0F172A"/>
+              </a:solidFill>
+              <a:latin typeface="Aptos"/>
+              <a:cs typeface="Aptos"/>
+            </a:endParaRPr>
           </a:p>
         </p:txBody>
       </p:sp>
@@ -3060,7 +3580,7 @@
           </a:ln>
         </p:spPr>
         <p:txBody>
-          <a:bodyPr wrap="square" anchor="ctr" lIns="36576" rIns="36576" tIns="36576" bIns="36576"/>
+          <a:bodyPr wrap="square" lIns="36576" tIns="36576" rIns="36576" bIns="36576" anchor="ctr"/>
           <a:lstStyle/>
           <a:p>
             <a:pPr algn="ctr"/>
@@ -3074,6 +3594,13 @@
               </a:rPr>
               <a:t>design?</a:t>
             </a:r>
+            <a:endParaRPr lang="ru-RU" sz="900" b="1" dirty="0">
+              <a:solidFill>
+                <a:srgbClr val="0F172A"/>
+              </a:solidFill>
+              <a:latin typeface="Aptos"/>
+              <a:cs typeface="Aptos"/>
+            </a:endParaRPr>
           </a:p>
         </p:txBody>
       </p:sp>
@@ -3125,7 +3652,7 @@
           </a:ln>
         </p:spPr>
         <p:txBody>
-          <a:bodyPr wrap="square" anchor="ctr" lIns="36576" rIns="36576" tIns="36576" bIns="36576"/>
+          <a:bodyPr wrap="square" lIns="36576" tIns="36576" rIns="36576" bIns="36576" anchor="ctr"/>
           <a:lstStyle/>
           <a:p>
             <a:pPr algn="ctr"/>
@@ -3139,6 +3666,13 @@
               </a:rPr>
               <a:t>implement</a:t>
             </a:r>
+            <a:endParaRPr lang="ru-RU" sz="900" b="1" dirty="0">
+              <a:solidFill>
+                <a:srgbClr val="0F172A"/>
+              </a:solidFill>
+              <a:latin typeface="Aptos"/>
+              <a:cs typeface="Aptos"/>
+            </a:endParaRPr>
           </a:p>
         </p:txBody>
       </p:sp>
@@ -3190,7 +3724,7 @@
           </a:ln>
         </p:spPr>
         <p:txBody>
-          <a:bodyPr wrap="square" anchor="ctr" lIns="36576" rIns="36576" tIns="36576" bIns="36576"/>
+          <a:bodyPr wrap="square" lIns="36576" tIns="36576" rIns="36576" bIns="36576" anchor="ctr"/>
           <a:lstStyle/>
           <a:p>
             <a:pPr algn="ctr"/>
@@ -3204,6 +3738,13 @@
               </a:rPr>
               <a:t>verify/apply?</a:t>
             </a:r>
+            <a:endParaRPr lang="ru-RU" sz="900" b="1" dirty="0">
+              <a:solidFill>
+                <a:srgbClr val="92400E"/>
+              </a:solidFill>
+              <a:latin typeface="Aptos"/>
+              <a:cs typeface="Aptos"/>
+            </a:endParaRPr>
           </a:p>
         </p:txBody>
       </p:sp>
@@ -3255,7 +3796,7 @@
           </a:ln>
         </p:spPr>
         <p:txBody>
-          <a:bodyPr wrap="square" anchor="ctr" lIns="36576" rIns="36576" tIns="36576" bIns="36576"/>
+          <a:bodyPr wrap="square" lIns="36576" tIns="36576" rIns="36576" bIns="36576" anchor="ctr"/>
           <a:lstStyle/>
           <a:p>
             <a:pPr algn="ctr"/>
@@ -3269,6 +3810,13 @@
               </a:rPr>
               <a:t>archive-change</a:t>
             </a:r>
+            <a:endParaRPr lang="ru-RU" sz="900" b="1" dirty="0">
+              <a:solidFill>
+                <a:srgbClr val="0F172A"/>
+              </a:solidFill>
+              <a:latin typeface="Aptos"/>
+              <a:cs typeface="Aptos"/>
+            </a:endParaRPr>
           </a:p>
         </p:txBody>
       </p:sp>
@@ -3297,7 +3845,7 @@
           </a:ln>
         </p:spPr>
         <p:txBody>
-          <a:bodyPr wrap="square" anchor="ctr" lIns="73152" rIns="73152" tIns="73152" bIns="73152"/>
+          <a:bodyPr wrap="square" lIns="73152" tIns="73152" rIns="73152" bIns="73152" anchor="ctr"/>
           <a:lstStyle/>
           <a:p>
             <a:pPr algn="ctr"/>
@@ -3311,6 +3859,13 @@
               </a:rPr>
               <a:t>explore (read-only)</a:t>
             </a:r>
+            <a:endParaRPr lang="ru-RU" sz="1200" b="1" dirty="0">
+              <a:solidFill>
+                <a:srgbClr val="475569"/>
+              </a:solidFill>
+              <a:latin typeface="Aptos"/>
+              <a:cs typeface="Aptos"/>
+            </a:endParaRPr>
           </a:p>
         </p:txBody>
       </p:sp>
@@ -3338,7 +3893,7 @@
           </a:ln>
         </p:spPr>
         <p:txBody>
-          <a:bodyPr wrap="square" anchor="ctr" lIns="27432" rIns="27432" tIns="27432" bIns="27432"/>
+          <a:bodyPr wrap="square" lIns="27432" tIns="27432" rIns="27432" bIns="27432" anchor="ctr"/>
           <a:lstStyle/>
           <a:p>
             <a:pPr algn="ctr"/>
@@ -3352,6 +3907,13 @@
               </a:rPr>
               <a:t>фаза 1: folder-based master spec</a:t>
             </a:r>
+            <a:endParaRPr lang="ru-RU" sz="1000" b="1" dirty="0">
+              <a:solidFill>
+                <a:srgbClr val="1E3A8A"/>
+              </a:solidFill>
+              <a:latin typeface="Aptos"/>
+              <a:cs typeface="Aptos"/>
+            </a:endParaRPr>
           </a:p>
         </p:txBody>
       </p:sp>
@@ -3379,7 +3941,7 @@
           </a:ln>
         </p:spPr>
         <p:txBody>
-          <a:bodyPr wrap="square" anchor="ctr" lIns="27432" rIns="27432" tIns="27432" bIns="27432"/>
+          <a:bodyPr wrap="square" lIns="27432" tIns="27432" rIns="27432" bIns="27432" anchor="ctr"/>
           <a:lstStyle/>
           <a:p>
             <a:pPr algn="ctr"/>
@@ -3393,6 +3955,13 @@
               </a:rPr>
               <a:t>фаза 2: branch-diff + verify</a:t>
             </a:r>
+            <a:endParaRPr lang="ru-RU" sz="1000" b="1" dirty="0">
+              <a:solidFill>
+                <a:srgbClr val="166534"/>
+              </a:solidFill>
+              <a:latin typeface="Aptos"/>
+              <a:cs typeface="Aptos"/>
+            </a:endParaRPr>
           </a:p>
         </p:txBody>
       </p:sp>
@@ -3420,7 +3989,7 @@
           </a:ln>
         </p:spPr>
         <p:txBody>
-          <a:bodyPr wrap="square" anchor="t" lIns="109728" rIns="109728" tIns="109728" bIns="109728"/>
+          <a:bodyPr wrap="square" lIns="109728" tIns="109728" rIns="109728" bIns="109728" anchor="t"/>
           <a:lstStyle/>
           <a:p>
             <a:pPr algn="l"/>
@@ -3434,6 +4003,13 @@
               </a:rPr>
               <a:t>До</a:t>
             </a:r>
+            <a:endParaRPr lang="ru-RU" sz="1500" b="1" dirty="0">
+              <a:solidFill>
+                <a:srgbClr val="991B1B"/>
+              </a:solidFill>
+              <a:latin typeface="Aptos"/>
+              <a:cs typeface="Aptos"/>
+            </a:endParaRPr>
           </a:p>
           <a:p>
             <a:pPr algn="l"/>
@@ -3447,6 +4023,13 @@
               </a:rPr>
               <a:t>• master spec = один большой md</a:t>
             </a:r>
+            <a:endParaRPr lang="ru-RU" sz="1200" dirty="0">
+              <a:solidFill>
+                <a:srgbClr val="334155"/>
+              </a:solidFill>
+              <a:latin typeface="Aptos"/>
+              <a:cs typeface="Aptos"/>
+            </a:endParaRPr>
           </a:p>
           <a:p>
             <a:pPr algn="l"/>
@@ -3460,6 +4043,13 @@
               </a:rPr>
               <a:t>• агенту трудно выбрать релевантный контекст</a:t>
             </a:r>
+            <a:endParaRPr lang="ru-RU" sz="1200" dirty="0">
+              <a:solidFill>
+                <a:srgbClr val="334155"/>
+              </a:solidFill>
+              <a:latin typeface="Aptos"/>
+              <a:cs typeface="Aptos"/>
+            </a:endParaRPr>
           </a:p>
           <a:p>
             <a:pPr algn="l"/>
@@ -3473,6 +4063,13 @@
               </a:rPr>
               <a:t>• нет штатного change из ветки аналитика</a:t>
             </a:r>
+            <a:endParaRPr lang="ru-RU" sz="1200" dirty="0">
+              <a:solidFill>
+                <a:srgbClr val="334155"/>
+              </a:solidFill>
+              <a:latin typeface="Aptos"/>
+              <a:cs typeface="Aptos"/>
+            </a:endParaRPr>
           </a:p>
           <a:p>
             <a:pPr algn="l"/>
@@ -3486,6 +4083,13 @@
               </a:rPr>
               <a:t>• apply-change мыслится как финальный merge</a:t>
             </a:r>
+            <a:endParaRPr lang="ru-RU" sz="1200" dirty="0">
+              <a:solidFill>
+                <a:srgbClr val="334155"/>
+              </a:solidFill>
+              <a:latin typeface="Aptos"/>
+              <a:cs typeface="Aptos"/>
+            </a:endParaRPr>
           </a:p>
         </p:txBody>
       </p:sp>
@@ -3513,7 +4117,7 @@
           </a:ln>
         </p:spPr>
         <p:txBody>
-          <a:bodyPr wrap="square" anchor="t" lIns="109728" rIns="109728" tIns="109728" bIns="109728"/>
+          <a:bodyPr wrap="square" lIns="109728" tIns="109728" rIns="109728" bIns="109728" anchor="t"/>
           <a:lstStyle/>
           <a:p>
             <a:pPr algn="l"/>
@@ -3527,6 +4131,13 @@
               </a:rPr>
               <a:t>После</a:t>
             </a:r>
+            <a:endParaRPr lang="ru-RU" sz="1500" b="1" dirty="0">
+              <a:solidFill>
+                <a:srgbClr val="166534"/>
+              </a:solidFill>
+              <a:latin typeface="Aptos"/>
+              <a:cs typeface="Aptos"/>
+            </a:endParaRPr>
           </a:p>
           <a:p>
             <a:pPr algn="l"/>
@@ -3540,6 +4151,13 @@
               </a:rPr>
               <a:t>• master spec = openspec/&lt;service&gt;/ + _sdd</a:t>
             </a:r>
+            <a:endParaRPr lang="ru-RU" sz="1200" dirty="0">
+              <a:solidFill>
+                <a:srgbClr val="334155"/>
+              </a:solidFill>
+              <a:latin typeface="Aptos"/>
+              <a:cs typeface="Aptos"/>
+            </a:endParaRPr>
           </a:p>
           <a:p>
             <a:pPr algn="l"/>
@@ -3553,6 +4171,13 @@
               </a:rPr>
               <a:t>• чтение идет через navigation, manifest, coverage</a:t>
             </a:r>
+            <a:endParaRPr lang="ru-RU" sz="1200" dirty="0">
+              <a:solidFill>
+                <a:srgbClr val="334155"/>
+              </a:solidFill>
+              <a:latin typeface="Aptos"/>
+              <a:cs typeface="Aptos"/>
+            </a:endParaRPr>
           </a:p>
           <a:p>
             <a:pPr algn="l"/>
@@ -3566,6 +4191,13 @@
               </a:rPr>
               <a:t>• change.md можно собрать из локального git diff</a:t>
             </a:r>
+            <a:endParaRPr lang="ru-RU" sz="1200" dirty="0">
+              <a:solidFill>
+                <a:srgbClr val="334155"/>
+              </a:solidFill>
+              <a:latin typeface="Aptos"/>
+              <a:cs typeface="Aptos"/>
+            </a:endParaRPr>
           </a:p>
           <a:p>
             <a:pPr algn="l"/>
@@ -3579,6 +4211,13 @@
               </a:rPr>
               <a:t>• для branch-diff финал — verify source-of-truth</a:t>
             </a:r>
+            <a:endParaRPr lang="ru-RU" sz="1200" dirty="0">
+              <a:solidFill>
+                <a:srgbClr val="334155"/>
+              </a:solidFill>
+              <a:latin typeface="Aptos"/>
+              <a:cs typeface="Aptos"/>
+            </a:endParaRPr>
           </a:p>
         </p:txBody>
       </p:sp>
@@ -3602,7 +4241,7 @@
           </a:ln>
         </p:spPr>
         <p:txBody>
-          <a:bodyPr wrap="square" anchor="t" lIns="18288" rIns="18288" tIns="18288" bIns="18288"/>
+          <a:bodyPr wrap="square" lIns="18288" tIns="18288" rIns="18288" bIns="18288" anchor="t"/>
           <a:lstStyle/>
           <a:p>
             <a:pPr algn="ctr"/>
@@ -3614,8 +4253,15 @@
                 <a:latin typeface="Aptos"/>
                 <a:cs typeface="Aptos"/>
               </a:rPr>
-              <a:t>Итог: SDD сохраняет дисциплину change/design/tasks, но становится пригодным для больших сервисов и уже существующей проектной документации.</a:t>
-            </a:r>
+              <a:t>Итог: SDD-фреймворк сохраняет дисциплину change/design/tasks, но становится пригодным для больших сервисов и уже существующей проектной документации.</a:t>
+            </a:r>
+            <a:endParaRPr lang="ru-RU" sz="1400" b="1" dirty="0">
+              <a:solidFill>
+                <a:srgbClr val="0F172A"/>
+              </a:solidFill>
+              <a:latin typeface="Aptos"/>
+              <a:cs typeface="Aptos"/>
+            </a:endParaRPr>
           </a:p>
         </p:txBody>
       </p:sp>
@@ -3639,7 +4285,7 @@
           </a:ln>
         </p:spPr>
         <p:txBody>
-          <a:bodyPr wrap="square" anchor="t" lIns="18288" rIns="18288" tIns="18288" bIns="18288"/>
+          <a:bodyPr wrap="square" lIns="18288" tIns="18288" rIns="18288" bIns="18288" anchor="t"/>
           <a:lstStyle/>
           <a:p>
             <a:pPr algn="l"/>
@@ -3653,6 +4299,13 @@
               </a:rPr>
               <a:t>Источник: docs/sdd/PROBLEM.md, docs/sdd/SDD_DETAILS.md, docs/sdd/skills/README.md</a:t>
             </a:r>
+            <a:endParaRPr lang="ru-RU" sz="700" dirty="0">
+              <a:solidFill>
+                <a:srgbClr val="64748B"/>
+              </a:solidFill>
+              <a:latin typeface="Aptos"/>
+              <a:cs typeface="Aptos"/>
+            </a:endParaRPr>
           </a:p>
         </p:txBody>
       </p:sp>
@@ -3770,7 +4423,10 @@
       </a:bgFillStyleLst>
     </a:fmtScheme>
   </a:themeElements>
-  <a:objectDefaults/>
-  <a:extraClrSchemeLst/>
+  <a:extLst>
+    <a:ext uri="{05A4C25C-085E-4340-85A3-A5531E510DB2}">
+      <thm15:themeFamily xmlns:thm15="http://schemas.microsoft.com/office/thememl/2012/main" name="Office Theme" id="{62F939B6-93AF-4DB8-9C6B-D6C7DFDC589F}" vid="{4A3C46E8-61CC-4603-A589-7422A47A8E4A}"/>
+    </a:ext>
+  </a:extLst>
 </a:theme>
 </file>